--- a/IAMDEX_TFC_Presentacion_v2.pptx
+++ b/IAMDEX_TFC_Presentacion_v2.pptx
@@ -5,7 +5,7 @@
     <p:sldMasterId id="2147483648" r:id="rId1"/>
   </p:sldMasterIdLst>
   <p:notesMasterIdLst>
-    <p:notesMasterId r:id="rId10"/>
+    <p:notesMasterId r:id="rId11"/>
   </p:notesMasterIdLst>
   <p:sldIdLst>
     <p:sldId id="256" r:id="rId2"/>
@@ -15,7 +15,8 @@
     <p:sldId id="260" r:id="rId6"/>
     <p:sldId id="261" r:id="rId7"/>
     <p:sldId id="262" r:id="rId8"/>
-    <p:sldId id="263" r:id="rId9"/>
+    <p:sldId id="264" r:id="rId9"/>
+    <p:sldId id="263" r:id="rId10"/>
   </p:sldIdLst>
   <p:sldSz cx="9144000" cy="5143500" type="screen16x9"/>
   <p:notesSz cx="5143500" cy="9144000"/>
@@ -906,6 +907,90 @@
     </p:spTree>
     <p:extLst>
       <p:ext uri="{BB962C8B-B14F-4D97-AF65-F5344CB8AC3E}">
+        <p14:creationId xmlns:p14="http://schemas.microsoft.com/office/powerpoint/2010/main" val="39022582"/>
+      </p:ext>
+    </p:extLst>
+  </p:cSld>
+  <p:clrMapOvr>
+    <a:masterClrMapping/>
+  </p:clrMapOvr>
+</p:notes>
+</file>
+
+<file path=ppt/notesSlides/notesSlide9.xml><?xml version="1.0" encoding="utf-8"?>
+<p:notes xmlns:a="http://schemas.openxmlformats.org/drawingml/2006/main" xmlns:r="http://schemas.openxmlformats.org/officeDocument/2006/relationships" xmlns:p="http://schemas.openxmlformats.org/presentationml/2006/main">
+  <p:cSld>
+    <p:spTree>
+      <p:nvGrpSpPr>
+        <p:cNvPr id="1" name=""/>
+        <p:cNvGrpSpPr/>
+        <p:nvPr/>
+      </p:nvGrpSpPr>
+      <p:grpSpPr>
+        <a:xfrm>
+          <a:off x="0" y="0"/>
+          <a:ext cx="0" cy="0"/>
+          <a:chOff x="0" y="0"/>
+          <a:chExt cx="0" cy="0"/>
+        </a:xfrm>
+      </p:grpSpPr>
+      <p:sp>
+        <p:nvSpPr>
+          <p:cNvPr id="2" name="Slide Image Placeholder 1"/>
+          <p:cNvSpPr>
+            <a:spLocks noGrp="1" noRot="1" noChangeAspect="1"/>
+          </p:cNvSpPr>
+          <p:nvPr>
+            <p:ph type="sldImg"/>
+          </p:nvPr>
+        </p:nvSpPr>
+        <p:spPr/>
+      </p:sp>
+      <p:sp>
+        <p:nvSpPr>
+          <p:cNvPr id="3" name="Notes Placeholder 2"/>
+          <p:cNvSpPr>
+            <a:spLocks noGrp="1"/>
+          </p:cNvSpPr>
+          <p:nvPr>
+            <p:ph type="body" idx="1"/>
+          </p:nvPr>
+        </p:nvSpPr>
+        <p:spPr/>
+        <p:txBody>
+          <a:bodyPr/>
+          <a:lstStyle/>
+          <a:p>
+            <a:endParaRPr lang="en-US" dirty="0"/>
+          </a:p>
+        </p:txBody>
+      </p:sp>
+      <p:sp>
+        <p:nvSpPr>
+          <p:cNvPr id="4" name="Slide Number Placeholder 3"/>
+          <p:cNvSpPr>
+            <a:spLocks noGrp="1"/>
+          </p:cNvSpPr>
+          <p:nvPr>
+            <p:ph type="sldNum" sz="quarter" idx="10"/>
+          </p:nvPr>
+        </p:nvSpPr>
+        <p:spPr/>
+        <p:txBody>
+          <a:bodyPr/>
+          <a:lstStyle/>
+          <a:p>
+            <a:fld id="{F7021451-1387-4CA6-816F-3879F97B5CBC}" type="slidenum">
+              <a:rPr lang="en-US"/>
+              <a:t>9</a:t>
+            </a:fld>
+            <a:endParaRPr lang="en-US"/>
+          </a:p>
+        </p:txBody>
+      </p:sp>
+    </p:spTree>
+    <p:extLst>
+      <p:ext uri="{BB962C8B-B14F-4D97-AF65-F5344CB8AC3E}">
         <p14:creationId xmlns:p14="http://schemas.microsoft.com/office/powerpoint/2010/main" val="1024086991"/>
       </p:ext>
     </p:extLst>
@@ -1335,7 +1420,7 @@
               <a:buNone/>
             </a:pPr>
             <a:r>
-              <a:rPr lang="en-US" sz="2600" b="1" dirty="0">
+              <a:rPr lang="en-US" sz="2600" b="1" dirty="0" smtClean="0">
                 <a:solidFill>
                   <a:srgbClr val="FFFFFF"/>
                 </a:solidFill>
@@ -1343,7 +1428,7 @@
                 <a:ea typeface="Calibri" pitchFamily="34" charset="-122"/>
                 <a:cs typeface="Calibri" pitchFamily="34" charset="-120"/>
               </a:rPr>
-              <a:t>IA</a:t>
+              <a:t>ID</a:t>
             </a:r>
             <a:endParaRPr lang="en-US" sz="2600" dirty="0"/>
           </a:p>
@@ -1564,11 +1649,65 @@
           </a:p>
         </p:txBody>
       </p:sp>
+      <p:pic>
+        <p:nvPicPr>
+          <p:cNvPr id="14" name="Imagen 13"/>
+          <p:cNvPicPr preferRelativeResize="0">
+            <a:picLocks/>
+          </p:cNvPicPr>
+          <p:nvPr/>
+        </p:nvPicPr>
+        <p:blipFill rotWithShape="1">
+          <a:blip r:embed="rId3">
+            <a:extLst>
+              <a:ext uri="{28A0092B-C50C-407E-A947-70E740481C1C}">
+                <a14:useLocalDpi xmlns:a14="http://schemas.microsoft.com/office/drawing/2010/main" val="0"/>
+              </a:ext>
+            </a:extLst>
+          </a:blip>
+          <a:srcRect l="16484" t="14557" r="16027" b="13013"/>
+          <a:stretch/>
+        </p:blipFill>
+        <p:spPr>
+          <a:xfrm>
+            <a:off x="1108800" y="1371600"/>
+            <a:ext cx="1620000" cy="1620000"/>
+          </a:xfrm>
+          <a:prstGeom prst="ellipse">
+            <a:avLst/>
+          </a:prstGeom>
+          <a:ln w="63500" cap="rnd">
+            <a:solidFill>
+              <a:srgbClr val="333333"/>
+            </a:solidFill>
+          </a:ln>
+          <a:effectLst/>
+          <a:scene3d>
+            <a:camera prst="orthographicFront"/>
+            <a:lightRig rig="contrasting" dir="t">
+              <a:rot lat="0" lon="0" rev="3000000"/>
+            </a:lightRig>
+          </a:scene3d>
+          <a:sp3d contourW="7620">
+            <a:bevelT w="95250" h="31750"/>
+            <a:contourClr>
+              <a:srgbClr val="333333"/>
+            </a:contourClr>
+          </a:sp3d>
+        </p:spPr>
+      </p:pic>
     </p:spTree>
   </p:cSld>
   <p:clrMapOvr>
     <a:masterClrMapping/>
   </p:clrMapOvr>
+  <p:timing>
+    <p:tnLst>
+      <p:par>
+        <p:cTn id="1" dur="indefinite" restart="never" nodeType="tmRoot"/>
+      </p:par>
+    </p:tnLst>
+  </p:timing>
 </p:sld>
 </file>
 
@@ -5287,6 +5426,39 @@
               <a:buNone/>
             </a:pPr>
             <a:r>
+              <a:rPr lang="en-US" sz="1300" dirty="0" err="1">
+                <a:solidFill>
+                  <a:srgbClr val="6B7280"/>
+                </a:solidFill>
+                <a:latin typeface="Calibri" pitchFamily="34" charset="0"/>
+                <a:ea typeface="Calibri" pitchFamily="34" charset="-122"/>
+                <a:cs typeface="Calibri" pitchFamily="34" charset="-120"/>
+              </a:rPr>
+              <a:t>P</a:t>
+            </a:r>
+            <a:r>
+              <a:rPr lang="en-US" sz="1300" dirty="0" err="1" smtClean="0">
+                <a:solidFill>
+                  <a:srgbClr val="6B7280"/>
+                </a:solidFill>
+                <a:latin typeface="Calibri" pitchFamily="34" charset="0"/>
+                <a:ea typeface="Calibri" pitchFamily="34" charset="-122"/>
+                <a:cs typeface="Calibri" pitchFamily="34" charset="-120"/>
+              </a:rPr>
+              <a:t>rincipales</a:t>
+            </a:r>
+            <a:r>
+              <a:rPr lang="en-US" sz="1300" dirty="0" smtClean="0">
+                <a:solidFill>
+                  <a:srgbClr val="6B7280"/>
+                </a:solidFill>
+                <a:latin typeface="Calibri" pitchFamily="34" charset="0"/>
+                <a:ea typeface="Calibri" pitchFamily="34" charset="-122"/>
+                <a:cs typeface="Calibri" pitchFamily="34" charset="-120"/>
+              </a:rPr>
+              <a:t> </a:t>
+            </a:r>
+            <a:r>
               <a:rPr lang="en-US" sz="1300" dirty="0">
                 <a:solidFill>
                   <a:srgbClr val="6B7280"/>
@@ -5295,7 +5467,7 @@
                 <a:ea typeface="Calibri" pitchFamily="34" charset="-122"/>
                 <a:cs typeface="Calibri" pitchFamily="34" charset="-120"/>
               </a:rPr>
-              <a:t>Demostración en vivo — principales flujos de usuario</a:t>
+              <a:t>flujos de usuario</a:t>
             </a:r>
             <a:endParaRPr lang="en-US" sz="1300" dirty="0"/>
           </a:p>
@@ -8481,6 +8653,132 @@
 
 <file path=ppt/slides/slide8.xml><?xml version="1.0" encoding="utf-8"?>
 <p:sld xmlns:a="http://schemas.openxmlformats.org/drawingml/2006/main" xmlns:r="http://schemas.openxmlformats.org/officeDocument/2006/relationships" xmlns:p="http://schemas.openxmlformats.org/presentationml/2006/main">
+  <p:cSld>
+    <p:spTree>
+      <p:nvGrpSpPr>
+        <p:cNvPr id="1" name=""/>
+        <p:cNvGrpSpPr/>
+        <p:nvPr/>
+      </p:nvGrpSpPr>
+      <p:grpSpPr>
+        <a:xfrm>
+          <a:off x="0" y="0"/>
+          <a:ext cx="0" cy="0"/>
+          <a:chOff x="0" y="0"/>
+          <a:chExt cx="0" cy="0"/>
+        </a:xfrm>
+      </p:grpSpPr>
+      <p:sp>
+        <p:nvSpPr>
+          <p:cNvPr id="2" name="Shape 0"/>
+          <p:cNvSpPr/>
+          <p:nvPr/>
+        </p:nvSpPr>
+        <p:spPr>
+          <a:xfrm>
+            <a:off x="0" y="0"/>
+            <a:ext cx="9144000" cy="5143500"/>
+          </a:xfrm>
+          <a:prstGeom prst="rect">
+            <a:avLst/>
+          </a:prstGeom>
+          <a:solidFill>
+            <a:srgbClr val="5B21B6"/>
+          </a:solidFill>
+          <a:ln/>
+        </p:spPr>
+      </p:sp>
+      <p:sp>
+        <p:nvSpPr>
+          <p:cNvPr id="3" name="Text 1"/>
+          <p:cNvSpPr/>
+          <p:nvPr/>
+        </p:nvSpPr>
+        <p:spPr>
+          <a:xfrm>
+            <a:off x="0" y="162929"/>
+            <a:ext cx="9144000" cy="594360"/>
+          </a:xfrm>
+          <a:prstGeom prst="rect">
+            <a:avLst/>
+          </a:prstGeom>
+          <a:noFill/>
+          <a:ln/>
+        </p:spPr>
+        <p:txBody>
+          <a:bodyPr wrap="square" rtlCol="0" anchor="ctr"/>
+          <a:lstStyle/>
+          <a:p>
+            <a:pPr marL="0" indent="0" algn="ctr">
+              <a:buNone/>
+            </a:pPr>
+            <a:r>
+              <a:rPr lang="en-US" sz="2600" b="1" dirty="0" smtClean="0">
+                <a:solidFill>
+                  <a:srgbClr val="FFFFFF"/>
+                </a:solidFill>
+                <a:latin typeface="Calibri" pitchFamily="34" charset="0"/>
+                <a:ea typeface="Calibri" pitchFamily="34" charset="-122"/>
+                <a:cs typeface="Calibri" pitchFamily="34" charset="-120"/>
+              </a:rPr>
+              <a:t>Demo en vivo</a:t>
+            </a:r>
+            <a:endParaRPr lang="en-US" sz="2600" dirty="0"/>
+          </a:p>
+        </p:txBody>
+      </p:sp>
+      <p:pic>
+        <p:nvPicPr>
+          <p:cNvPr id="19" name="Imagen 18"/>
+          <p:cNvPicPr>
+            <a:picLocks noChangeAspect="1"/>
+          </p:cNvPicPr>
+          <p:nvPr/>
+        </p:nvPicPr>
+        <p:blipFill>
+          <a:blip r:embed="rId3">
+            <a:extLst>
+              <a:ext uri="{28A0092B-C50C-407E-A947-70E740481C1C}">
+                <a14:useLocalDpi xmlns:a14="http://schemas.microsoft.com/office/drawing/2010/main" val="0"/>
+              </a:ext>
+            </a:extLst>
+          </a:blip>
+          <a:stretch>
+            <a:fillRect/>
+          </a:stretch>
+        </p:blipFill>
+        <p:spPr>
+          <a:xfrm>
+            <a:off x="2190750" y="381000"/>
+            <a:ext cx="4762500" cy="4762500"/>
+          </a:xfrm>
+          <a:prstGeom prst="rect">
+            <a:avLst/>
+          </a:prstGeom>
+        </p:spPr>
+      </p:pic>
+    </p:spTree>
+    <p:extLst>
+      <p:ext uri="{BB962C8B-B14F-4D97-AF65-F5344CB8AC3E}">
+        <p14:creationId xmlns:p14="http://schemas.microsoft.com/office/powerpoint/2010/main" val="1372270671"/>
+      </p:ext>
+    </p:extLst>
+  </p:cSld>
+  <p:clrMapOvr>
+    <a:masterClrMapping/>
+  </p:clrMapOvr>
+  <p:timing>
+    <p:tnLst>
+      <p:par>
+        <p:cTn id="1" dur="indefinite" restart="never" nodeType="tmRoot"/>
+      </p:par>
+    </p:tnLst>
+  </p:timing>
+</p:sld>
+</file>
+
+<file path=ppt/slides/slide9.xml><?xml version="1.0" encoding="utf-8"?>
+<p:sld xmlns:a="http://schemas.openxmlformats.org/drawingml/2006/main" xmlns:r="http://schemas.openxmlformats.org/officeDocument/2006/relationships" xmlns:p="http://schemas.openxmlformats.org/presentationml/2006/main">
   <p:cSld name="Slide 8">
     <p:spTree>
       <p:nvGrpSpPr>
@@ -8518,70 +8816,6 @@
       </p:sp>
       <p:sp>
         <p:nvSpPr>
-          <p:cNvPr id="3" name="Shape 1"/>
-          <p:cNvSpPr/>
-          <p:nvPr/>
-        </p:nvSpPr>
-        <p:spPr>
-          <a:xfrm>
-            <a:off x="3566160" y="548640"/>
-            <a:ext cx="2011680" cy="2011680"/>
-          </a:xfrm>
-          <a:prstGeom prst="ellipse">
-            <a:avLst/>
-          </a:prstGeom>
-          <a:solidFill>
-            <a:srgbClr val="7C3AED"/>
-          </a:solidFill>
-          <a:ln w="38100">
-            <a:solidFill>
-              <a:srgbClr val="A78BFA"/>
-            </a:solidFill>
-            <a:prstDash val="solid"/>
-          </a:ln>
-        </p:spPr>
-      </p:sp>
-      <p:sp>
-        <p:nvSpPr>
-          <p:cNvPr id="4" name="Text 2"/>
-          <p:cNvSpPr/>
-          <p:nvPr/>
-        </p:nvSpPr>
-        <p:spPr>
-          <a:xfrm>
-            <a:off x="3566160" y="1097280"/>
-            <a:ext cx="2011680" cy="914400"/>
-          </a:xfrm>
-          <a:prstGeom prst="rect">
-            <a:avLst/>
-          </a:prstGeom>
-          <a:noFill/>
-          <a:ln/>
-        </p:spPr>
-        <p:txBody>
-          <a:bodyPr wrap="square" rtlCol="0" anchor="ctr"/>
-          <a:lstStyle/>
-          <a:p>
-            <a:pPr marL="0" indent="0" algn="ctr">
-              <a:buNone/>
-            </a:pPr>
-            <a:r>
-              <a:rPr lang="en-US" sz="4000" b="1" dirty="0">
-                <a:solidFill>
-                  <a:srgbClr val="FFFFFF"/>
-                </a:solidFill>
-                <a:latin typeface="Calibri" pitchFamily="34" charset="0"/>
-                <a:ea typeface="Calibri" pitchFamily="34" charset="-122"/>
-                <a:cs typeface="Calibri" pitchFamily="34" charset="-120"/>
-              </a:rPr>
-              <a:t>IA</a:t>
-            </a:r>
-            <a:endParaRPr lang="en-US" sz="4000" dirty="0"/>
-          </a:p>
-        </p:txBody>
-      </p:sp>
-      <p:sp>
-        <p:nvSpPr>
           <p:cNvPr id="5" name="Text 3"/>
           <p:cNvSpPr/>
           <p:nvPr/>
@@ -8736,11 +8970,65 @@
           </a:p>
         </p:txBody>
       </p:sp>
+      <p:pic>
+        <p:nvPicPr>
+          <p:cNvPr id="9" name="Imagen 8"/>
+          <p:cNvPicPr preferRelativeResize="0">
+            <a:picLocks/>
+          </p:cNvPicPr>
+          <p:nvPr/>
+        </p:nvPicPr>
+        <p:blipFill rotWithShape="1">
+          <a:blip r:embed="rId3">
+            <a:extLst>
+              <a:ext uri="{28A0092B-C50C-407E-A947-70E740481C1C}">
+                <a14:useLocalDpi xmlns:a14="http://schemas.microsoft.com/office/drawing/2010/main" val="0"/>
+              </a:ext>
+            </a:extLst>
+          </a:blip>
+          <a:srcRect l="16484" t="14557" r="16027" b="13013"/>
+          <a:stretch/>
+        </p:blipFill>
+        <p:spPr>
+          <a:xfrm>
+            <a:off x="3567600" y="547200"/>
+            <a:ext cx="1980000" cy="1980000"/>
+          </a:xfrm>
+          <a:prstGeom prst="ellipse">
+            <a:avLst/>
+          </a:prstGeom>
+          <a:ln w="63500" cap="rnd">
+            <a:solidFill>
+              <a:srgbClr val="333333"/>
+            </a:solidFill>
+          </a:ln>
+          <a:effectLst/>
+          <a:scene3d>
+            <a:camera prst="orthographicFront"/>
+            <a:lightRig rig="contrasting" dir="t">
+              <a:rot lat="0" lon="0" rev="3000000"/>
+            </a:lightRig>
+          </a:scene3d>
+          <a:sp3d contourW="7620">
+            <a:bevelT w="95250" h="31750"/>
+            <a:contourClr>
+              <a:srgbClr val="333333"/>
+            </a:contourClr>
+          </a:sp3d>
+        </p:spPr>
+      </p:pic>
     </p:spTree>
   </p:cSld>
   <p:clrMapOvr>
     <a:masterClrMapping/>
   </p:clrMapOvr>
+  <p:timing>
+    <p:tnLst>
+      <p:par>
+        <p:cTn id="1" dur="indefinite" restart="never" nodeType="tmRoot"/>
+      </p:par>
+    </p:tnLst>
+  </p:timing>
 </p:sld>
 </file>
 

--- a/IAMDEX_TFC_Presentacion_v2.pptx
+++ b/IAMDEX_TFC_Presentacion_v2.pptx
@@ -8648,6 +8648,13 @@
   <p:clrMapOvr>
     <a:masterClrMapping/>
   </p:clrMapOvr>
+  <p:timing>
+    <p:tnLst>
+      <p:par>
+        <p:cTn id="1" dur="indefinite" restart="never" nodeType="tmRoot"/>
+      </p:par>
+    </p:tnLst>
+  </p:timing>
 </p:sld>
 </file>
 
@@ -8729,14 +8736,16 @@
       </p:sp>
       <p:pic>
         <p:nvPicPr>
-          <p:cNvPr id="19" name="Imagen 18"/>
+          <p:cNvPr id="19" name="Imagen 18">
+            <a:hlinkClick r:id="rId3"/>
+          </p:cNvPr>
           <p:cNvPicPr>
             <a:picLocks noChangeAspect="1"/>
           </p:cNvPicPr>
           <p:nvPr/>
         </p:nvPicPr>
         <p:blipFill>
-          <a:blip r:embed="rId3">
+          <a:blip r:embed="rId4">
             <a:extLst>
               <a:ext uri="{28A0092B-C50C-407E-A947-70E740481C1C}">
                 <a14:useLocalDpi xmlns:a14="http://schemas.microsoft.com/office/drawing/2010/main" val="0"/>
